--- a/docs/week-14/cen429-week-14-sunum.en.pptx
+++ b/docs/week-14/cen429-week-14-sunum.en.pptx
@@ -33731,40 +33731,30 @@
           </a:p>
         </p:txBody>
       </p:sp>
-      <p:sp>
-        <p:nvSpPr>
-          <p:cNvPr id="7" name="TextBox 6"/>
-          <p:cNvSpPr txBox="1"/>
-          <p:nvPr/>
-        </p:nvSpPr>
-        <p:spPr>
-          <a:xfrm>
-            <a:off x="640080" y="1325880"/>
-            <a:ext cx="10911535" cy="4402328"/>
-          </a:xfrm>
-          <a:prstGeom prst="rect">
-            <a:avLst/>
-          </a:prstGeom>
-          <a:noFill/>
-        </p:spPr>
-        <p:txBody>
-          <a:bodyPr wrap="square" lIns="45720" rIns="45720">
-            <a:spAutoFit/>
-          </a:bodyPr>
-          <a:lstStyle/>
-          <a:p>
-            <a:pPr algn="l"/>
-            <a:r>
-              <a:rPr sz="1300" b="0">
-                <a:solidFill>
-                  <a:srgbClr val="1F2D3A"/>
-                </a:solidFill>
-              </a:rPr>
-              <a:t>&lt;svg viewBox="0 0 960 240" style="width:96%;height:auto;display:block;margin:6px auto" font-family="sans-serif"&gt; &lt;g font-size="14"&gt; &lt;rect x="10" y="70" width="120" height="60" rx="8" fill="#e8f6f7" stroke="#0a9396"/&gt;&lt;text x="70" y="98" text-anchor="middle" font-weight="bold"&gt;temiz.c&lt;/text&gt;&lt;text x="70" y="118" text-anchor="middle" font-size="12"&gt;okunur kaynak&lt;/text&gt; &lt;rect x="175" y="70" width="140" height="60" rx="8" fill="#006d77"/&gt;&lt;text x="245" y="95" text-anchor="middle" fill="#fff" font-weight="bold"&gt;TIGRESS&lt;/text&gt;&lt;text x="245" y="114" text-anchor="middle" fill="#cdeff1" font-size="12"&gt;+ tohum · dönüşüm&lt;/text&gt; &lt;rect x="360" y="70" width="120" height="60" rx="8" fill="#e8f6f7" stroke="#0a9396"/&gt;&lt;text x="420" y="98" text-anchor="middle" font-weight="bold"&gt;gizli.c&lt;/text&gt;&lt;text x="420" y="118" text-anchor="middle" font-size="12"&gt;gizlenmiş kaynak&lt;/text&gt; &lt;rect x="525" y="70" width="110" height="60" rx="8" fill="#eaf4ea" stroke="#2e7d32"/&gt;&lt;text x="580" y="98" text-anchor="middle" font-weight="bold"&gt;derle&lt;/text&gt;&lt;text x="580" y="118" text-anchor="middle" font-size="12"&gt;+ SBOM&lt;/text&gt; &lt;rect x="680" y="70" width="110" height="60" rx="8" fill="#fdf1e7" stroke="#b5651d"/&gt;&lt;text x="735" y="98" text-anchor="middle" font-weight="bold"&gt;İMZALA&lt;/text&gt;&lt;text x="735" y="118" text-anchor="middle" font-size="12"&gt;son ikili&lt;/text&gt; &lt;rect x="835" y="70" width="110" height="60" rx="8" fill="#eef2ff" stroke="#4054b2"/&gt;&lt;text x="890" y="98" text-anchor="middle" font-weight="bold"&gt;dağıt&lt;/text&gt; &lt;/g&gt; &lt;g stroke="#333" stroke-width="3"&gt; &lt;line x1="130" y1="100" x2="175" y2="100" marker-end="url(#a14)"/&gt; &lt;line x1="315" y1="100" x2="360" y2="100" marker-end="url(#a14)"/&gt; &lt;line x1="480" y1="100" x2="525" y2="100" marker-end="url(#a14)"/&gt; &lt;line x1="635" y1="100" x2="680" y2="100" marker-end="url(#a14)"/&gt; &lt;line x1="790" y1="100" x2="835" y2="100" marker-end="url(#a14)"/&gt; &lt;/g&gt; &lt;text x="245" y="165" text-anchor="middle" font-size="13" fill="#c0392b"&gt;farklı tohum → farklı ikili (aynı davranış)&lt;/text&gt; &lt;text x="735" y="165" text-anchor="middle" font-size="13" fill="#b5651d"&gt;imza EN SON: önce gizle, sonra imzala&lt;/text&gt; &lt;text x="480" y="205" text-anchor="middle" font-size="15" fill="#2e7d32" font-weight="bold"&gt;Her hattan sonra: 1) davranışı test et · 2) maliyeti ölç (boyut/hız)&lt;/text&gt; &lt;defs&gt;&lt;marker id="a14" markerWidth="9" markerHeight="9" refX="7" refY="3" orient="auto"&gt;&lt;path d="M0,0 L7,3 L0,6 Z" fill="#333"/&gt;&lt;/marker&gt;&lt;/defs&gt; &lt;/svg&gt;</a:t>
-            </a:r>
-          </a:p>
-        </p:txBody>
-      </p:sp>
+      <p:pic>
+        <p:nvPicPr>
+          <p:cNvPr id="7" name="Picture 6" descr="h14-01-kaynaktan-kaynaga-hat.png"/>
+          <p:cNvPicPr>
+            <a:picLocks noChangeAspect="1"/>
+          </p:cNvPicPr>
+          <p:nvPr/>
+        </p:nvPicPr>
+        <p:blipFill>
+          <a:blip r:embed="rId3"/>
+          <a:stretch>
+            <a:fillRect/>
+          </a:stretch>
+        </p:blipFill>
+        <p:spPr>
+          <a:xfrm>
+            <a:off x="1833529" y="1325880"/>
+            <a:ext cx="8524636" cy="3379457"/>
+          </a:xfrm>
+          <a:prstGeom prst="rect">
+            <a:avLst/>
+          </a:prstGeom>
+        </p:spPr>
+      </p:pic>
     </p:spTree>
   </p:cSld>
   <p:clrMapOvr>
